--- a/presentation final.pptx
+++ b/presentation final.pptx
@@ -2295,15 +2295,35 @@
           <a:lstStyle/>
           <a:p>
             <a:r>
+              <a:rPr dirty="0"/>
               <a:t>Ben</a:t>
             </a:r>
           </a:p>
           <a:p>
-            <a:endParaRPr/>
-          </a:p>
-          <a:p>
-            <a:r>
-              <a:t>Kusumegi et al. use diff-in-diff like us and find LLM adopters cite more diversely, but paper quality declines. Our contribution is causal identification of how LLM availability affects cross-field citation entropy specifically, using continuous treatment intensity.</a:t>
+            <a:endParaRPr dirty="0"/>
+          </a:p>
+          <a:p>
+            <a:r>
+              <a:rPr dirty="0" err="1"/>
+              <a:t>Kusumegi</a:t>
+            </a:r>
+            <a:r>
+              <a:rPr dirty="0"/>
+              <a:t> et al. use diff-in-diff like us and find LLM adopters cite more diversely, but paper quality declines. Our contribution is causal identification of how LLM </a:t>
+            </a:r>
+            <a:r>
+              <a:t>a</a:t>
+            </a:r>
+            <a:r>
+              <a:rPr lang="en-US"/>
+              <a:t>doption </a:t>
+            </a:r>
+            <a:r>
+              <a:t>affects </a:t>
+            </a:r>
+            <a:r>
+              <a:rPr dirty="0"/>
+              <a:t>cross-field citation entropy specifically, using continuous treatment intensity.</a:t>
             </a:r>
           </a:p>
         </p:txBody>
@@ -13212,7 +13232,7 @@
                 <a:ea typeface="Calibri" pitchFamily="34" charset="-122"/>
                 <a:cs typeface="Calibri" pitchFamily="34" charset="-120"/>
               </a:rPr>
-              <a:t>Our contribution: causal identification of how LLM availability affects cross-field citation entropy using continuous treatment intensity</a:t>
+              <a:t>Our contribution: causal identification of how LLM adoption affects cross-field citation entropy using continuous treatment intensity</a:t>
             </a:r>
             <a:endParaRPr lang="en-US" sz="1200" dirty="0"/>
           </a:p>
@@ -14654,6 +14674,7 @@
           <a:lstStyle/>
           <a:p>
             <a:pPr algn="ctr"/>
+            <a:endParaRPr/>
           </a:p>
         </p:txBody>
       </p:sp>
@@ -15195,6 +15216,7 @@
           <a:lstStyle/>
           <a:p>
             <a:pPr algn="ctr"/>
+            <a:endParaRPr/>
           </a:p>
         </p:txBody>
       </p:sp>
